--- a/demo示意图.pptx
+++ b/demo示意图.pptx
@@ -4947,7 +4947,7 @@
         </p:nvSpPr>
         <p:spPr>
           <a:xfrm>
-            <a:off x="3731090" y="2181210"/>
+            <a:off x="3781911" y="2183783"/>
             <a:ext cx="2483114" cy="369332"/>
           </a:xfrm>
           <a:prstGeom prst="rect">
